--- a/docs/intro-slides/intro-slides.pptx
+++ b/docs/intro-slides/intro-slides.pptx
@@ -130,43 +130,43 @@
   <p:extLst>
     <p:ext uri="{521415D9-36F7-43E2-AB2F-B90AF26B5E84}">
       <p14:sectionLst xmlns:p14="http://schemas.microsoft.com/office/powerpoint/2010/main">
-        <p14:section name="オープニング" id="{06268472-f36d-04bc-db3f-09b692be6747}">
+        <p14:section name="オープニング" id="{6ef00242-2ff1-71b1-1532-db377755acb6}">
           <p14:sldIdLst>
             <p14:sldId id="256"/>
             <p14:sldId id="257"/>
             <p14:sldId id="258"/>
           </p14:sldIdLst>
         </p14:section>
-        <p14:section name="営業とは" id="{6d662c17-7b86-6590-b3bd-2124fe3642ca}">
+        <p14:section name="営業とは" id="{aca8b950-6969-2935-7afd-4ef62aac1c4a}">
           <p14:sldIdLst>
             <p14:sldId id="259"/>
           </p14:sldIdLst>
         </p14:section>
-        <p14:section name="MISSION" id="{befeee9a-8cc5-8a91-799f-423b2a66ef07}">
+        <p14:section name="MISSION" id="{4778d98d-714b-4460-bddc-191d83161348}">
           <p14:sldIdLst>
             <p14:sldId id="260"/>
             <p14:sldId id="261"/>
             <p14:sldId id="262"/>
           </p14:sldIdLst>
         </p14:section>
-        <p14:section name="何を確認する？" id="{51b5ee8f-c632-0441-6889-45b561d8fdcd}">
+        <p14:section name="何を確認する？" id="{093d742f-b22b-78e2-0007-75513ff0aff8}">
           <p14:sldIdLst>
             <p14:sldId id="263"/>
             <p14:sldId id="264"/>
           </p14:sldIdLst>
         </p14:section>
-        <p14:section name="お客様が実現したいこと" id="{ca72c0e0-4b93-74a5-bde2-d33f42b38db5}">
+        <p14:section name="お客様が実現したいこと" id="{53653d2a-5323-0b65-4b08-cc7a3a5f618c}">
           <p14:sldIdLst>
             <p14:sldId id="265"/>
             <p14:sldId id="266"/>
           </p14:sldIdLst>
         </p14:section>
-        <p14:section name="放っておくと何が起きる？" id="{acacaeff-01df-fc05-af45-b6f6ff0e62e4}">
+        <p14:section name="放っておくと何が起きる？" id="{42091222-20f2-92a0-0661-b788a1b8c745}">
           <p14:sldIdLst>
             <p14:sldId id="267"/>
           </p14:sldIdLst>
         </p14:section>
-        <p14:section name="光電センサの基本" id="{34c1c98d-74c9-afca-2539-45e4137a8f31}">
+        <p14:section name="光電センサの基本" id="{464ca698-2ae7-7145-98ef-2490920b428c}">
           <p14:sldIdLst>
             <p14:sldId id="268"/>
             <p14:sldId id="269"/>
@@ -178,18 +178,18 @@
             <p14:sldId id="275"/>
           </p14:sldIdLst>
         </p14:section>
-        <p14:section name="まとめ" id="{e33d6a71-ba6d-196d-4d8c-271952071e85}">
+        <p14:section name="まとめ" id="{229daa57-6aaa-35a2-a2e5-eb9dd52cc8eb}">
           <p14:sldIdLst>
             <p14:sldId id="276"/>
             <p14:sldId id="277"/>
           </p14:sldIdLst>
         </p14:section>
-        <p14:section name="YOUR MISSION" id="{dba2f996-2ad0-99d2-3208-11582e127232}">
+        <p14:section name="YOUR MISSION" id="{42392609-1a70-27c8-f4d3-06c985c12eab}">
           <p14:sldIdLst>
             <p14:sldId id="278"/>
           </p14:sldIdLst>
         </p14:section>
-        <p14:section name="エンディング" id="{1e83063e-f3a2-6f61-0ade-6950978d8f34}">
+        <p14:section name="エンディング" id="{bcc22517-0bec-b571-1464-7f20852e84c7}">
           <p14:sldIdLst>
             <p14:sldId id="279"/>
           </p14:sldIdLst>

--- a/docs/intro-slides/intro-slides.pptx
+++ b/docs/intro-slides/intro-slides.pptx
@@ -28,10 +28,9 @@
     <p:sldId id="276" r:id="rId22"/>
     <p:sldId id="277" r:id="rId23"/>
     <p:sldId id="278" r:id="rId24"/>
-    <p:sldId id="279" r:id="rId25"/>
   </p:sldIdLst>
   <p:notesMasterIdLst>
-    <p:notesMasterId r:id="rId26"/>
+    <p:notesMasterId r:id="rId25"/>
   </p:notesMasterIdLst>
   <p:sldSz cx="12192000" cy="6858000"/>
   <p:notesSz cx="6858000" cy="12192000"/>
@@ -130,43 +129,43 @@
   <p:extLst>
     <p:ext uri="{521415D9-36F7-43E2-AB2F-B90AF26B5E84}">
       <p14:sectionLst xmlns:p14="http://schemas.microsoft.com/office/powerpoint/2010/main">
-        <p14:section name="オープニング" id="{6ef00242-2ff1-71b1-1532-db377755acb6}">
+        <p14:section name="オープニング" id="{a75770ff-f504-b520-46b4-13a2418e1ee2}">
           <p14:sldIdLst>
             <p14:sldId id="256"/>
             <p14:sldId id="257"/>
             <p14:sldId id="258"/>
           </p14:sldIdLst>
         </p14:section>
-        <p14:section name="営業とは" id="{aca8b950-6969-2935-7afd-4ef62aac1c4a}">
+        <p14:section name="営業とは" id="{e9888374-336c-29d1-fd97-97da13f4fc05}">
           <p14:sldIdLst>
             <p14:sldId id="259"/>
           </p14:sldIdLst>
         </p14:section>
-        <p14:section name="MISSION" id="{4778d98d-714b-4460-bddc-191d83161348}">
+        <p14:section name="MISSION" id="{4d013c93-1549-82d1-e121-45a3787d7c08}">
           <p14:sldIdLst>
             <p14:sldId id="260"/>
             <p14:sldId id="261"/>
             <p14:sldId id="262"/>
           </p14:sldIdLst>
         </p14:section>
-        <p14:section name="何を確認する？" id="{093d742f-b22b-78e2-0007-75513ff0aff8}">
+        <p14:section name="何を確認する？" id="{f38b4ec6-c680-a2c6-7b42-fdc6f34ebde6}">
           <p14:sldIdLst>
             <p14:sldId id="263"/>
             <p14:sldId id="264"/>
           </p14:sldIdLst>
         </p14:section>
-        <p14:section name="お客様が実現したいこと" id="{53653d2a-5323-0b65-4b08-cc7a3a5f618c}">
+        <p14:section name="お客様が実現したいこと" id="{7bde03d1-309c-e2a0-ce8a-6d8f26ca1c98}">
           <p14:sldIdLst>
             <p14:sldId id="265"/>
             <p14:sldId id="266"/>
           </p14:sldIdLst>
         </p14:section>
-        <p14:section name="放っておくと何が起きる？" id="{42091222-20f2-92a0-0661-b788a1b8c745}">
+        <p14:section name="放っておくと何が起きる？" id="{090845c5-b23e-d15a-9b33-5d0e53065aa2}">
           <p14:sldIdLst>
             <p14:sldId id="267"/>
           </p14:sldIdLst>
         </p14:section>
-        <p14:section name="光電センサの基本" id="{464ca698-2ae7-7145-98ef-2490920b428c}">
+        <p14:section name="光電センサの基本" id="{9ff9ec7f-e465-b403-777d-ac05d2e8bc0a}">
           <p14:sldIdLst>
             <p14:sldId id="268"/>
             <p14:sldId id="269"/>
@@ -175,23 +174,22 @@
             <p14:sldId id="272"/>
             <p14:sldId id="273"/>
             <p14:sldId id="274"/>
-            <p14:sldId id="275"/>
           </p14:sldIdLst>
         </p14:section>
-        <p14:section name="まとめ" id="{229daa57-6aaa-35a2-a2e5-eb9dd52cc8eb}">
+        <p14:section name="まとめ" id="{4d356ba1-e9ac-60f4-2112-192130a5d309}">
           <p14:sldIdLst>
+            <p14:sldId id="275"/>
             <p14:sldId id="276"/>
+          </p14:sldIdLst>
+        </p14:section>
+        <p14:section name="YOUR MISSION" id="{2e834801-52c3-2592-5c6a-992c0d9743a3}">
+          <p14:sldIdLst>
             <p14:sldId id="277"/>
           </p14:sldIdLst>
         </p14:section>
-        <p14:section name="YOUR MISSION" id="{42392609-1a70-27c8-f4d3-06c985c12eab}">
+        <p14:section name="エンディング" id="{f2046558-205e-06b1-c9ed-e82d5ceef061}">
           <p14:sldIdLst>
             <p14:sldId id="278"/>
-          </p14:sldIdLst>
-        </p14:section>
-        <p14:section name="エンディング" id="{bcc22517-0bec-b571-1464-7f20852e84c7}">
-          <p14:sldIdLst>
-            <p14:sldId id="279"/>
           </p14:sldIdLst>
         </p14:section>
       </p14:sectionLst>
@@ -598,10 +596,10 @@
           <a:p>
             <a:r>
               <a:rPr lang="en-US" dirty="0"/>
-              <a:t>オープニング
-動画の位置：0:00〜0:05
-■ ナレーション
-「営業」と聞いて、皆さんはどんな仕事を想像するでしょうか。</a:t>
+              <a:t>■ セリフ
+ナレーション：「営業」と聞いて、皆さんはどんな仕事を想像するでしょうか。
+―――――― 以下、制作用の情報
+導入動画｜オープニング｜動画の位置：0:00〜0:05</a:t>
             </a:r>
             <a:endParaRPr lang="en-US" dirty="0"/>
           </a:p>
@@ -689,10 +687,10 @@
           <a:p>
             <a:r>
               <a:rPr lang="en-US" dirty="0"/>
-              <a:t>お客様が実現したいこと
-動画の位置：1:05〜1:19
-■ ナレーション
-大切なのは、いきなり「このセンサを使いましょう」と提案することではありません。まず確認するのは、「お客様は本当は、何を実現したいのか」ということです。</a:t>
+              <a:t>■ セリフ
+ナレーション：大切なのは、いきなり「このセンサを使いましょう」と提案することではありません。まず確認するのは、「お客様は本当は、何を実現したいのか」ということです。
+―――――― 以下、制作用の情報
+導入動画｜お客様が実現したいこと｜動画の位置：1:05〜1:19</a:t>
             </a:r>
             <a:endParaRPr lang="en-US" dirty="0"/>
           </a:p>
@@ -780,7 +778,8 @@
           <a:p>
             <a:r>
               <a:rPr lang="en-US" dirty="0"/>
-              <a:t>考える時間（動画では 1:23.8 で止まる場所）
+              <a:t>■ セリフ
+（セリフなし。動画が 1:23.8 で止まり、考える時間）
 ■ 問いかけ
 誤カウントを放っておくと、現場では何が起きると思う？
 ■ 進め方
@@ -872,10 +871,10 @@
           <a:p>
             <a:r>
               <a:rPr lang="en-US" dirty="0"/>
-              <a:t>放っておくと何が起きる？
-動画の位置：1:19〜1:38
-■ ナレーション
-さらに重要なのは、その問題を放っておくと、何が起きるのか。カウントがずれる。数量確認が必要になる。人が確認する。作業時間が増える。センサの問題に見えていたものが、生産性や作業負担の問題につながっているかもしれません。</a:t>
+              <a:t>■ セリフ
+ナレーション：さらに重要なのは、その問題を放っておくと、何が起きるのか。カウントがずれる。数量確認が必要になる。人が確認する。作業時間が増える。センサの問題に見えていたものが、生産性や作業負担の問題につながっているかもしれません。
+―――――― 以下、制作用の情報
+導入動画｜放っておくと何が起きる？｜動画の位置：1:19〜1:38</a:t>
             </a:r>
             <a:endParaRPr lang="en-US" dirty="0"/>
           </a:p>
@@ -963,10 +962,10 @@
           <a:p>
             <a:r>
               <a:rPr lang="en-US" dirty="0"/>
-              <a:t>光電センサの基本
-動画の位置：1:38〜1:52
-■ ナレーション
-提案の前に、光電センサの基本を押さえておきましょう。光電センサは、光を出し、その光の変化で、モノを検出するセンサです。光を出す側を「投光器」、受ける側を「受光器」と呼びます。</a:t>
+              <a:t>■ セリフ
+ナレーション：提案の前に、光電センサの基本を押さえておきましょう。光電センサは、光を出し、その光の変化で、モノを検出するセンサです。光を出す側を「投光器」、受ける側を「受光器」と呼びます。
+―――――― 以下、制作用の情報
+導入動画｜光電センサの基本｜動画の位置：1:38〜1:52</a:t>
             </a:r>
             <a:endParaRPr lang="en-US" dirty="0"/>
           </a:p>
@@ -1054,10 +1053,10 @@
           <a:p>
             <a:r>
               <a:rPr lang="en-US" dirty="0"/>
-              <a:t>光電センサの基本
-動画の位置：1:52〜1:56
-■ ナレーション
-光の当て方の違いで、大きく3種類の方式に分かれます。</a:t>
+              <a:t>■ セリフ
+ナレーション：光の当て方の違いで、大きく3種類の方式に分かれます。
+―――――― 以下、制作用の情報
+導入動画｜光電センサの基本｜動画の位置：1:52〜1:56</a:t>
             </a:r>
             <a:endParaRPr lang="en-US" dirty="0"/>
           </a:p>
@@ -1145,10 +1144,10 @@
           <a:p>
             <a:r>
               <a:rPr lang="en-US" dirty="0"/>
-              <a:t>光電センサの基本：透過型
-動画の位置：1:56〜2:12
-■ ナレーション
-1つめは「透過型」。投光器と受光器が、別々の筐体です。モノが光を遮ったら検出します。色や形に左右されにくく、長い距離でも安定して検出できます。ただし、両側に配線が必要です。</a:t>
+              <a:t>■ セリフ
+ナレーション：1つめは「透過型」。投光器と受光器が、別々の筐体です。モノが光を遮ったら検出します。色や形に左右されにくく、長い距離でも安定して検出できます。ただし、両側に配線が必要です。
+―――――― 以下、制作用の情報
+導入動画｜光電センサの基本：透過型｜動画の位置：1:56〜2:12</a:t>
             </a:r>
             <a:endParaRPr lang="en-US" dirty="0"/>
           </a:p>
@@ -1236,10 +1235,10 @@
           <a:p>
             <a:r>
               <a:rPr lang="en-US" dirty="0"/>
-              <a:t>光電センサの基本：回帰反射型
-動画の位置：2:12〜2:27
-■ ナレーション
-2つめは「回帰反射型」。投光と受光が1つの筐体です。反射板で折り返した光が、遮られたら検出します。配線は片側だけ。透過型に近い安定性で、設置がラクです。</a:t>
+              <a:t>■ セリフ
+ナレーション：2つめは「回帰反射型」。投光と受光が1つの筐体です。反射板で折り返した光が、遮られたら検出します。配線は片側だけ。透過型に近い安定性で、設置がラクです。
+―――――― 以下、制作用の情報
+導入動画｜光電センサの基本：回帰反射型｜動画の位置：2:12〜2:27</a:t>
             </a:r>
             <a:endParaRPr lang="en-US" dirty="0"/>
           </a:p>
@@ -1327,10 +1326,10 @@
           <a:p>
             <a:r>
               <a:rPr lang="en-US" dirty="0"/>
-              <a:t>光電センサの基本：回帰反射型
-動画の位置：2:27〜2:31
-■ ナレーション
-鏡のように光るモノは、偏光フィルタ付きで対策します。</a:t>
+              <a:t>■ セリフ
+ナレーション：回帰反射型には「透明体専用」タイプもあります。ペットボトルやガラスは光をほとんど通すので、見逃しがちです。透明体専用は、光がわずかに減る変化をとらえて検出します。
+―――――― 以下、制作用の情報
+導入動画｜光電センサの基本：透明体専用｜動画の位置：2:31〜2:44</a:t>
             </a:r>
             <a:endParaRPr lang="en-US" dirty="0"/>
           </a:p>
@@ -1418,10 +1417,10 @@
           <a:p>
             <a:r>
               <a:rPr lang="en-US" dirty="0"/>
-              <a:t>光電センサの基本：透明体専用
-動画の位置：2:31〜2:44
-■ ナレーション
-回帰反射型には「透明体専用」タイプもあります。ペットボトルやガラスは光をほとんど通すので、見逃しがちです。透明体専用は、光がわずかに減る変化をとらえて検出します。</a:t>
+              <a:t>■ セリフ
+ナレーション：3つめは「反射型」。モノに当たって返ってきた光で検出します。反射板が要らず、センサ1台で済むのが強みです。ただ、黒いモノは光が返りにくく、不安定になりがちです。
+―――――― 以下、制作用の情報
+導入動画｜光電センサの基本：反射型｜動画の位置：2:44〜2:56</a:t>
             </a:r>
             <a:endParaRPr lang="en-US" dirty="0"/>
           </a:p>
@@ -1509,10 +1508,10 @@
           <a:p>
             <a:r>
               <a:rPr lang="en-US" dirty="0"/>
-              <a:t>光電センサの基本：反射型
-動画の位置：2:44〜2:56
-■ ナレーション
-3つめは「反射型」。モノに当たって返ってきた光で検出します。反射板が要らず、センサ1台で済むのが強みです。ただ、黒いモノは光が返りにくく、不安定になりがちです。</a:t>
+              <a:t>■ セリフ
+ナレーション：そこで「距離設定型（BGS）」です。普通の反射型は、光の「量」で判断します。BGSは三角測距で、光が受光素子の「どの位置」に戻ったかから距離を判別します。手前だけを検出するので、黒いモノや背景に強くなります。
+―――――― 以下、制作用の情報
+導入動画｜光電センサの基本：距離設定型（BGS）｜動画の位置：2:56〜3:13</a:t>
             </a:r>
             <a:endParaRPr lang="en-US" dirty="0"/>
           </a:p>
@@ -1600,10 +1599,10 @@
           <a:p>
             <a:r>
               <a:rPr lang="en-US" dirty="0"/>
-              <a:t>オープニング
-動画の位置：0:05〜0:10
-■ ナレーション
-商品を紹介する。価格を伝える。もちろん、それも営業の仕事です。</a:t>
+              <a:t>■ セリフ
+ナレーション：商品を紹介する。価格を伝える。もちろん、それも営業の仕事です。
+―――――― 以下、制作用の情報
+導入動画｜オープニング｜動画の位置：0:05〜0:10</a:t>
             </a:r>
             <a:endParaRPr lang="en-US" dirty="0"/>
           </a:p>
@@ -1691,10 +1690,10 @@
           <a:p>
             <a:r>
               <a:rPr lang="en-US" dirty="0"/>
-              <a:t>光電センサの基本：距離設定型（BGS）
-動画の位置：2:56〜3:13
-■ ナレーション
-そこで「距離設定型（BGS）」です。普通の反射型は、光の「量」で判断します。BGSは三角測距で、光が受光素子の「どの位置」に戻ったかから距離を判別します。手前だけを検出するので、黒いモノや背景に強くなります。</a:t>
+              <a:t>■ セリフ
+ナレーション：確実さなら透過型、配線をラクにするなら回帰反射型。透明なモノは透明体専用、色や背景が気になるなら距離設定型。しかし、どれが高性能か、ではありません。今回のお客様には、どれが最適なのか。それを考えるのが営業です。
+―――――― 以下、制作用の情報
+導入動画｜まとめ：どれを選ぶ？｜動画の位置：3:13〜3:33</a:t>
             </a:r>
             <a:endParaRPr lang="en-US" dirty="0"/>
           </a:p>
@@ -1782,10 +1781,12 @@
           <a:p>
             <a:r>
               <a:rPr lang="en-US" dirty="0"/>
-              <a:t>まとめ：どれを選ぶ？
-動画の位置：3:13〜3:33
-■ ナレーション
-確実さなら透過型、配線をラクにするなら回帰反射型。透明なモノは透明体専用、色や背景が気になるなら距離設定型。しかし、どれが高性能か、ではありません。今回のお客様には、どれが最適なのか。それを考えるのが営業です。</a:t>
+              <a:t>■ セリフ
+（セリフなし。動画が 3:32.8 で止まり、考える時間）
+■ 問いかけ
+今回のお客様のボトルは「透明」。どの方式が合いそう？
+■ 進め方
+15秒で、理由を1つ考えよう。答えは言わせっぱなしでよい（正解は言わない）。</a:t>
             </a:r>
             <a:endParaRPr lang="en-US" dirty="0"/>
           </a:p>
@@ -1873,11 +1874,10 @@
           <a:p>
             <a:r>
               <a:rPr lang="en-US" dirty="0"/>
-              <a:t>考える時間（動画では 3:32.8 で止まる場所）
-■ 問いかけ
-今回のお客様のボトルは「透明」。どの方式が合いそう？
-■ 進め方
-15秒で、理由を1つ考えよう。答えは言わせっぱなしでよい（正解は言わない）。</a:t>
+              <a:t>■ セリフ
+ナレーション：皆さんにお願いするのは、センサを当てることではありません。お客様に質問し、情報を集め、本当の課題を考え、解決策を提案してください。まずはお客様に現状を確認します。
+―――――― 以下、制作用の情報
+導入動画｜YOUR MISSION｜動画の位置：3:33〜3:49</a:t>
             </a:r>
             <a:endParaRPr lang="en-US" dirty="0"/>
           </a:p>
@@ -1965,10 +1965,10 @@
           <a:p>
             <a:r>
               <a:rPr lang="en-US" dirty="0"/>
-              <a:t>YOUR MISSION
-動画の位置：3:33〜3:49
-■ ナレーション
-皆さんにお願いするのは、センサを当てることではありません。お客様に質問し、情報を集め、本当の課題を考え、解決策を提案してください。まずはお客様に現状を確認します。</a:t>
+              <a:t>■ セリフ
+ナレーション：それでは、オプテックス・エフエーの営業になったつもりで、お客様の課題を解決してみましょう。
+―――――― 以下、制作用の情報
+導入動画｜エンディング｜動画の位置：3:49〜3:58</a:t>
             </a:r>
             <a:endParaRPr lang="en-US" dirty="0"/>
           </a:p>
@@ -1992,97 +1992,6 @@
             <a:fld id="{F7021451-1387-4CA6-816F-3879F97B5CBC}" type="slidenum">
               <a:rPr lang="en-US"/>
               <a:t>23</a:t>
-            </a:fld>
-            <a:endParaRPr lang="en-US"/>
-          </a:p>
-        </p:txBody>
-      </p:sp>
-    </p:spTree>
-    <p:extLst>
-      <p:ext uri="{BB962C8B-B14F-4D97-AF65-F5344CB8AC3E}">
-        <p14:creationId xmlns:p14="http://schemas.microsoft.com/office/powerpoint/2010/main" val="1024086991"/>
-      </p:ext>
-    </p:extLst>
-  </p:cSld>
-  <p:clrMapOvr>
-    <a:masterClrMapping/>
-  </p:clrMapOvr>
-</p:notes>
-</file>
-
-<file path=ppt/notesSlides/notesSlide24.xml><?xml version="1.0" encoding="utf-8"?>
-<p:notes xmlns:a="http://schemas.openxmlformats.org/drawingml/2006/main" xmlns:r="http://schemas.openxmlformats.org/officeDocument/2006/relationships" xmlns:p="http://schemas.openxmlformats.org/presentationml/2006/main">
-  <p:cSld>
-    <p:spTree>
-      <p:nvGrpSpPr>
-        <p:cNvPr id="1" name=""/>
-        <p:cNvGrpSpPr/>
-        <p:nvPr/>
-      </p:nvGrpSpPr>
-      <p:grpSpPr>
-        <a:xfrm>
-          <a:off x="0" y="0"/>
-          <a:ext cx="0" cy="0"/>
-          <a:chOff x="0" y="0"/>
-          <a:chExt cx="0" cy="0"/>
-        </a:xfrm>
-      </p:grpSpPr>
-      <p:sp>
-        <p:nvSpPr>
-          <p:cNvPr id="2" name="Slide Image Placeholder 1"/>
-          <p:cNvSpPr>
-            <a:spLocks noGrp="1" noRot="1" noChangeAspect="1"/>
-          </p:cNvSpPr>
-          <p:nvPr>
-            <p:ph type="sldImg"/>
-          </p:nvPr>
-        </p:nvSpPr>
-        <p:spPr/>
-      </p:sp>
-      <p:sp>
-        <p:nvSpPr>
-          <p:cNvPr id="3" name="Notes Placeholder 2"/>
-          <p:cNvSpPr>
-            <a:spLocks noGrp="1"/>
-          </p:cNvSpPr>
-          <p:nvPr>
-            <p:ph type="body" idx="1"/>
-          </p:nvPr>
-        </p:nvSpPr>
-        <p:spPr/>
-        <p:txBody>
-          <a:bodyPr/>
-          <a:lstStyle/>
-          <a:p>
-            <a:r>
-              <a:rPr lang="en-US" dirty="0"/>
-              <a:t>エンディング
-動画の位置：3:49〜3:58
-■ ナレーション
-それでは、オプテックス・エフエーの営業になったつもりで、お客様の課題を解決してみましょう。</a:t>
-            </a:r>
-            <a:endParaRPr lang="en-US" dirty="0"/>
-          </a:p>
-        </p:txBody>
-      </p:sp>
-      <p:sp>
-        <p:nvSpPr>
-          <p:cNvPr id="4" name="Slide Number Placeholder 3"/>
-          <p:cNvSpPr>
-            <a:spLocks noGrp="1"/>
-          </p:cNvSpPr>
-          <p:nvPr>
-            <p:ph type="sldNum" sz="quarter" idx="10"/>
-          </p:nvPr>
-        </p:nvSpPr>
-        <p:spPr/>
-        <p:txBody>
-          <a:bodyPr/>
-          <a:lstStyle/>
-          <a:p>
-            <a:fld id="{F7021451-1387-4CA6-816F-3879F97B5CBC}" type="slidenum">
-              <a:rPr lang="en-US"/>
-              <a:t>24</a:t>
             </a:fld>
             <a:endParaRPr lang="en-US"/>
           </a:p>
@@ -2147,10 +2056,10 @@
           <a:p>
             <a:r>
               <a:rPr lang="en-US" dirty="0"/>
-              <a:t>オープニング
-動画の位置：0:10〜0:15
-■ ナレーション
-でも、オプテックス・エフエーの営業は、それだけではありません。</a:t>
+              <a:t>■ セリフ
+ナレーション：でも、オプテックス・エフエーの営業は、それだけではありません。
+―――――― 以下、制作用の情報
+導入動画｜オープニング｜動画の位置：0:10〜0:15</a:t>
             </a:r>
             <a:endParaRPr lang="en-US" dirty="0"/>
           </a:p>
@@ -2238,10 +2147,10 @@
           <a:p>
             <a:r>
               <a:rPr lang="en-US" dirty="0"/>
-              <a:t>営業とは
-動画の位置：0:15〜0:27
-■ ナレーション
-お客様の話を聞き、現場で何が起きているのかを整理し、本当の課題を考え、最適な解決策を提案する。これが今回体験してもらう、コンサルティング営業です。</a:t>
+              <a:t>■ セリフ
+ナレーション：お客様の話を聞き、現場で何が起きているのかを整理し、本当の課題を考え、最適な解決策を提案する。これが今回体験してもらう、コンサルティング営業です。
+―――――― 以下、制作用の情報
+導入動画｜営業とは｜動画の位置：0:15〜0:27</a:t>
             </a:r>
             <a:endParaRPr lang="en-US" dirty="0"/>
           </a:p>
@@ -2329,10 +2238,10 @@
           <a:p>
             <a:r>
               <a:rPr lang="en-US" dirty="0"/>
-              <a:t>MISSION
-動画の位置：0:27〜0:30
-■ ナレーション
-今回のお客様は、飲料工場です。</a:t>
+              <a:t>■ セリフ
+ナレーション：今回のお客様は、飲料工場です。
+―――――― 以下、制作用の情報
+導入動画｜MISSION｜動画の位置：0:27〜0:30</a:t>
             </a:r>
             <a:endParaRPr lang="en-US" dirty="0"/>
           </a:p>
@@ -2420,10 +2329,10 @@
           <a:p>
             <a:r>
               <a:rPr lang="en-US" dirty="0"/>
-              <a:t>MISSION
-動画の位置：0:30〜0:48
-■ ナレーション
-コンベア上を、中身の入ったペットボトルが次々と流れています。工場では光電センサを使って、ペットボトルの本数をカウントしています。ところが最近、センサが時々誤動作し、実際よりも多くカウントしてしまうという問題が起きています。</a:t>
+              <a:t>■ セリフ
+ナレーション：コンベア上を、中身の入ったペットボトルが次々と流れています。工場では光電センサを使って、ペットボトルの本数をカウントしています。ところが最近、センサが時々誤動作し、実際よりも多くカウントしてしまうという問題が起きています。
+―――――― 以下、制作用の情報
+導入動画｜MISSION｜動画の位置：0:30〜0:48</a:t>
             </a:r>
             <a:endParaRPr lang="en-US" dirty="0"/>
           </a:p>
@@ -2511,7 +2420,8 @@
           <a:p>
             <a:r>
               <a:rPr lang="en-US" dirty="0"/>
-              <a:t>考える時間（動画では 0:54.9 で止まる場所）
+              <a:t>■ セリフ
+（セリフなし。動画が 0:54.9 で止まり、考える時間）
 ■ 問いかけ
 営業である皆さんは、お客様に何を確認しますか？
 ■ 進め方
@@ -2603,10 +2513,10 @@
           <a:p>
             <a:r>
               <a:rPr lang="en-US" dirty="0"/>
-              <a:t>何を確認する？
-動画の位置：0:48〜1:01
-■ ナレーション
-この課題を解決するために、営業である皆さんは、お客様に何を確認しますか？　センサの種類でしょうか。ペットボトルの形でしょうか。設置位置でしょうか。</a:t>
+              <a:t>■ セリフ
+ナレーション：この課題を解決するために、営業である皆さんは、お客様に何を確認しますか？　センサの種類でしょうか。ペットボトルの形でしょうか。設置位置でしょうか。
+―――――― 以下、制作用の情報
+導入動画｜何を確認する？｜動画の位置：0:48〜1:01</a:t>
             </a:r>
             <a:endParaRPr lang="en-US" dirty="0"/>
           </a:p>
@@ -2694,10 +2604,10 @@
           <a:p>
             <a:r>
               <a:rPr lang="en-US" dirty="0"/>
-              <a:t>何を確認する？
-動画の位置：1:01〜1:05
-■ ナレーション
-実は、ここからが営業の仕事です。</a:t>
+              <a:t>■ セリフ
+ナレーション：実は、ここからが営業の仕事です。
+―――――― 以下、制作用の情報
+導入動画｜何を確認する？｜動画の位置：1:01〜1:05</a:t>
             </a:r>
             <a:endParaRPr lang="en-US" dirty="0"/>
           </a:p>
@@ -3706,7 +3616,7 @@
       </p:grpSpPr>
       <p:pic>
         <p:nvPicPr>
-          <p:cNvPr id="2" name="INTRO_15" descr="導入動画 2:27〜2:31　光電センサの基本：回帰反射型">    </p:cNvPr>
+          <p:cNvPr id="2" name="INTRO_16" descr="導入動画 2:31〜2:44　光電センサの基本：透明体専用">    </p:cNvPr>
           <p:cNvPicPr>
             <a:picLocks noChangeAspect="1"/>
           </p:cNvPicPr>
@@ -3762,7 +3672,7 @@
       </p:grpSpPr>
       <p:pic>
         <p:nvPicPr>
-          <p:cNvPr id="2" name="INTRO_16" descr="導入動画 2:31〜2:44　光電センサの基本：透明体専用">    </p:cNvPr>
+          <p:cNvPr id="2" name="INTRO_17" descr="導入動画 2:44〜2:56　光電センサの基本：反射型">    </p:cNvPr>
           <p:cNvPicPr>
             <a:picLocks noChangeAspect="1"/>
           </p:cNvPicPr>
@@ -3818,7 +3728,7 @@
       </p:grpSpPr>
       <p:pic>
         <p:nvPicPr>
-          <p:cNvPr id="2" name="INTRO_17" descr="導入動画 2:44〜2:56　光電センサの基本：反射型">    </p:cNvPr>
+          <p:cNvPr id="2" name="INTRO_18" descr="導入動画 2:56〜3:13　光電センサの基本：距離設定型（BGS）">    </p:cNvPr>
           <p:cNvPicPr>
             <a:picLocks noChangeAspect="1"/>
           </p:cNvPicPr>
@@ -3930,7 +3840,7 @@
       </p:grpSpPr>
       <p:pic>
         <p:nvPicPr>
-          <p:cNvPr id="2" name="INTRO_18" descr="導入動画 2:56〜3:13　光電センサの基本：距離設定型（BGS）">    </p:cNvPr>
+          <p:cNvPr id="2" name="INTRO_19" descr="導入動画 3:13〜3:33　まとめ：どれを選ぶ？">    </p:cNvPr>
           <p:cNvPicPr>
             <a:picLocks noChangeAspect="1"/>
           </p:cNvPicPr>
@@ -3966,62 +3876,6 @@
     <p:bg>
       <p:bgPr>
         <a:solidFill>
-          <a:srgbClr val="000000"/>
-        </a:solidFill>
-      </p:bgPr>
-    </p:bg>
-    <p:spTree>
-      <p:nvGrpSpPr>
-        <p:cNvPr id="1" name=""/>
-        <p:cNvGrpSpPr/>
-        <p:nvPr/>
-      </p:nvGrpSpPr>
-      <p:grpSpPr>
-        <a:xfrm>
-          <a:off x="0" y="0"/>
-          <a:ext cx="0" cy="0"/>
-          <a:chOff x="0" y="0"/>
-          <a:chExt cx="0" cy="0"/>
-        </a:xfrm>
-      </p:grpSpPr>
-      <p:pic>
-        <p:nvPicPr>
-          <p:cNvPr id="2" name="INTRO_19" descr="導入動画 3:13〜3:33　まとめ：どれを選ぶ？">    </p:cNvPr>
-          <p:cNvPicPr>
-            <a:picLocks noChangeAspect="1"/>
-          </p:cNvPicPr>
-          <p:nvPr/>
-        </p:nvPicPr>
-        <p:blipFill>
-          <a:blip r:embed="rId1"/>
-          <a:stretch>
-            <a:fillRect/>
-          </a:stretch>
-        </p:blipFill>
-        <p:spPr>
-          <a:xfrm>
-            <a:off x="0" y="0"/>
-            <a:ext cx="12191695" cy="6858000"/>
-          </a:xfrm>
-          <a:prstGeom prst="rect">
-            <a:avLst/>
-          </a:prstGeom>
-        </p:spPr>
-      </p:pic>
-    </p:spTree>
-  </p:cSld>
-  <p:clrMapOvr>
-    <a:masterClrMapping/>
-  </p:clrMapOvr>
-</p:sld>
-</file>
-
-<file path=ppt/slides/slide22.xml><?xml version="1.0" encoding="utf-8"?>
-<p:sld xmlns:a="http://schemas.openxmlformats.org/drawingml/2006/main" xmlns:r="http://schemas.openxmlformats.org/officeDocument/2006/relationships" xmlns:p="http://schemas.openxmlformats.org/presentationml/2006/main">
-  <p:cSld name="Slide 22">
-    <p:bg>
-      <p:bgPr>
-        <a:solidFill>
           <a:srgbClr val="141517"/>
         </a:solidFill>
       </p:bgPr>
@@ -4258,9 +4112,9 @@
 </p:sld>
 </file>
 
-<file path=ppt/slides/slide23.xml><?xml version="1.0" encoding="utf-8"?>
+<file path=ppt/slides/slide22.xml><?xml version="1.0" encoding="utf-8"?>
 <p:sld xmlns:a="http://schemas.openxmlformats.org/drawingml/2006/main" xmlns:r="http://schemas.openxmlformats.org/officeDocument/2006/relationships" xmlns:p="http://schemas.openxmlformats.org/presentationml/2006/main">
-  <p:cSld name="Slide 23">
+  <p:cSld name="Slide 22">
     <p:bg>
       <p:bgPr>
         <a:solidFill>
@@ -4314,9 +4168,9 @@
 </p:sld>
 </file>
 
-<file path=ppt/slides/slide24.xml><?xml version="1.0" encoding="utf-8"?>
+<file path=ppt/slides/slide23.xml><?xml version="1.0" encoding="utf-8"?>
 <p:sld xmlns:a="http://schemas.openxmlformats.org/drawingml/2006/main" xmlns:r="http://schemas.openxmlformats.org/officeDocument/2006/relationships" xmlns:p="http://schemas.openxmlformats.org/presentationml/2006/main">
-  <p:cSld name="Slide 24">
+  <p:cSld name="Slide 23">
     <p:bg>
       <p:bgPr>
         <a:solidFill>
